--- a/textbook/ppt/chapter02_ppt.pptx
+++ b/textbook/ppt/chapter02_ppt.pptx
@@ -7,6 +7,12 @@
   <p:sldIdLst>
     <p:sldId id="256" r:id="rId7"/>
     <p:sldId id="257" r:id="rId8"/>
+    <p:sldId id="258" r:id="rId9"/>
+    <p:sldId id="259" r:id="rId10"/>
+    <p:sldId id="260" r:id="rId11"/>
+    <p:sldId id="261" r:id="rId12"/>
+    <p:sldId id="262" r:id="rId13"/>
+    <p:sldId id="263" r:id="rId14"/>
   </p:sldIdLst>
   <p:sldSz cx="12188952" cy="6858000" type="screen4x3"/>
   <p:notesSz cx="6858000" cy="9144000"/>
@@ -3229,6 +3235,636 @@
             <a:r>
               <a:rPr sz="1800"/>
               <a:t>• switch-case的基本概念与应用</a:t>
+            </a:r>
+          </a:p>
+        </p:txBody>
+      </p:sp>
+    </p:spTree>
+  </p:cSld>
+  <p:clrMapOvr>
+    <a:masterClrMapping/>
+  </p:clrMapOvr>
+</p:sld>
+</file>
+
+<file path=ppt/slides/slide3.xml><?xml version="1.0" encoding="utf-8"?>
+<p:sld xmlns:a="http://schemas.openxmlformats.org/drawingml/2006/main" xmlns:p="http://schemas.openxmlformats.org/presentationml/2006/main" xmlns:r="http://schemas.openxmlformats.org/officeDocument/2006/relationships">
+  <p:cSld>
+    <p:spTree>
+      <p:nvGrpSpPr>
+        <p:cNvPr id="1" name=""/>
+        <p:cNvGrpSpPr/>
+        <p:nvPr/>
+      </p:nvGrpSpPr>
+      <p:grpSpPr/>
+      <p:sp>
+        <p:nvSpPr>
+          <p:cNvPr id="2" name="TextBox 1"/>
+          <p:cNvSpPr txBox="1"/>
+          <p:nvPr/>
+        </p:nvSpPr>
+        <p:spPr>
+          <a:xfrm>
+            <a:off x="914400" y="457200"/>
+            <a:ext cx="10058400" cy="914400"/>
+          </a:xfrm>
+          <a:prstGeom prst="rect">
+            <a:avLst/>
+          </a:prstGeom>
+          <a:noFill/>
+        </p:spPr>
+        <p:txBody>
+          <a:bodyPr wrap="none">
+            <a:spAutoFit/>
+          </a:bodyPr>
+          <a:lstStyle/>
+          <a:p>
+            <a:r>
+              <a:rPr sz="2800" b="1">
+                <a:solidFill>
+                  <a:srgbClr val="8B0000"/>
+                </a:solidFill>
+              </a:rPr>
+              <a:t>本章概览</a:t>
+            </a:r>
+          </a:p>
+        </p:txBody>
+      </p:sp>
+      <p:sp>
+        <p:nvSpPr>
+          <p:cNvPr id="3" name="TextBox 2"/>
+          <p:cNvSpPr txBox="1"/>
+          <p:nvPr/>
+        </p:nvSpPr>
+        <p:spPr>
+          <a:xfrm>
+            <a:off x="914400" y="1371600"/>
+            <a:ext cx="10058400" cy="5029200"/>
+          </a:xfrm>
+          <a:prstGeom prst="rect">
+            <a:avLst/>
+          </a:prstGeom>
+          <a:noFill/>
+        </p:spPr>
+        <p:txBody>
+          <a:bodyPr wrap="none">
+            <a:spAutoFit/>
+          </a:bodyPr>
+          <a:lstStyle/>
+          <a:p/>
+          <a:p>
+            <a:r>
+              <a:rPr sz="1600">
+                <a:solidFill>
+                  <a:srgbClr val="000000"/>
+                </a:solidFill>
+              </a:rPr>
+              <a:t>if/else 条件判断</a:t>
+            </a:r>
+          </a:p>
+          <a:p>
+            <a:r>
+              <a:rPr sz="1600">
+                <a:solidFill>
+                  <a:srgbClr val="000000"/>
+                </a:solidFill>
+              </a:rPr>
+              <a:t>逻辑运算符：&amp;&amp;(与)、||(或)、!(非)</a:t>
+            </a:r>
+          </a:p>
+          <a:p>
+            <a:r>
+              <a:rPr sz="1600">
+                <a:solidFill>
+                  <a:srgbClr val="000000"/>
+                </a:solidFill>
+              </a:rPr>
+              <a:t>嵌套条件：if...else if...else</a:t>
+            </a:r>
+          </a:p>
+          <a:p>
+            <a:r>
+              <a:rPr sz="1600">
+                <a:solidFill>
+                  <a:srgbClr val="000000"/>
+                </a:solidFill>
+              </a:rPr>
+              <a:t>switch-case（C++特有）</a:t>
+            </a:r>
+          </a:p>
+        </p:txBody>
+      </p:sp>
+    </p:spTree>
+  </p:cSld>
+  <p:clrMapOvr>
+    <a:masterClrMapping/>
+  </p:clrMapOvr>
+</p:sld>
+</file>
+
+<file path=ppt/slides/slide4.xml><?xml version="1.0" encoding="utf-8"?>
+<p:sld xmlns:a="http://schemas.openxmlformats.org/drawingml/2006/main" xmlns:p="http://schemas.openxmlformats.org/presentationml/2006/main" xmlns:r="http://schemas.openxmlformats.org/officeDocument/2006/relationships">
+  <p:cSld>
+    <p:spTree>
+      <p:nvGrpSpPr>
+        <p:cNvPr id="1" name=""/>
+        <p:cNvGrpSpPr/>
+        <p:nvPr/>
+      </p:nvGrpSpPr>
+      <p:grpSpPr/>
+      <p:sp>
+        <p:nvSpPr>
+          <p:cNvPr id="2" name="TextBox 1"/>
+          <p:cNvSpPr txBox="1"/>
+          <p:nvPr/>
+        </p:nvSpPr>
+        <p:spPr>
+          <a:xfrm>
+            <a:off x="914400" y="457200"/>
+            <a:ext cx="10058400" cy="914400"/>
+          </a:xfrm>
+          <a:prstGeom prst="rect">
+            <a:avLst/>
+          </a:prstGeom>
+          <a:noFill/>
+        </p:spPr>
+        <p:txBody>
+          <a:bodyPr wrap="none">
+            <a:spAutoFit/>
+          </a:bodyPr>
+          <a:lstStyle/>
+          <a:p>
+            <a:r>
+              <a:rPr sz="2800" b="1">
+                <a:solidFill>
+                  <a:srgbClr val="8B0000"/>
+                </a:solidFill>
+              </a:rPr>
+              <a:t>C++ 代码示例</a:t>
+            </a:r>
+          </a:p>
+        </p:txBody>
+      </p:sp>
+      <p:sp>
+        <p:nvSpPr>
+          <p:cNvPr id="3" name="TextBox 2"/>
+          <p:cNvSpPr txBox="1"/>
+          <p:nvPr/>
+        </p:nvSpPr>
+        <p:spPr>
+          <a:xfrm>
+            <a:off x="914400" y="1371600"/>
+            <a:ext cx="10058400" cy="5029200"/>
+          </a:xfrm>
+          <a:prstGeom prst="rect">
+            <a:avLst/>
+          </a:prstGeom>
+          <a:noFill/>
+        </p:spPr>
+        <p:txBody>
+          <a:bodyPr wrap="none">
+            <a:spAutoFit/>
+          </a:bodyPr>
+          <a:lstStyle/>
+          <a:p/>
+          <a:p>
+            <a:r>
+              <a:rPr sz="1400">
+                <a:solidFill>
+                  <a:srgbClr val="000000"/>
+                </a:solidFill>
+              </a:rPr>
+              <a:t>int x;
+cin &gt;&gt; x;
+if (x &gt; 0) cout &lt;&lt; "正数";
+else if (x &lt; 0) cout &lt;&lt; "负数";
+else cout &lt;&lt; "零";</a:t>
+            </a:r>
+          </a:p>
+        </p:txBody>
+      </p:sp>
+    </p:spTree>
+  </p:cSld>
+  <p:clrMapOvr>
+    <a:masterClrMapping/>
+  </p:clrMapOvr>
+</p:sld>
+</file>
+
+<file path=ppt/slides/slide5.xml><?xml version="1.0" encoding="utf-8"?>
+<p:sld xmlns:a="http://schemas.openxmlformats.org/drawingml/2006/main" xmlns:p="http://schemas.openxmlformats.org/presentationml/2006/main" xmlns:r="http://schemas.openxmlformats.org/officeDocument/2006/relationships">
+  <p:cSld>
+    <p:spTree>
+      <p:nvGrpSpPr>
+        <p:cNvPr id="1" name=""/>
+        <p:cNvGrpSpPr/>
+        <p:nvPr/>
+      </p:nvGrpSpPr>
+      <p:grpSpPr/>
+      <p:sp>
+        <p:nvSpPr>
+          <p:cNvPr id="2" name="TextBox 1"/>
+          <p:cNvSpPr txBox="1"/>
+          <p:nvPr/>
+        </p:nvSpPr>
+        <p:spPr>
+          <a:xfrm>
+            <a:off x="914400" y="457200"/>
+            <a:ext cx="10058400" cy="914400"/>
+          </a:xfrm>
+          <a:prstGeom prst="rect">
+            <a:avLst/>
+          </a:prstGeom>
+          <a:noFill/>
+        </p:spPr>
+        <p:txBody>
+          <a:bodyPr wrap="none">
+            <a:spAutoFit/>
+          </a:bodyPr>
+          <a:lstStyle/>
+          <a:p>
+            <a:r>
+              <a:rPr sz="2800" b="1">
+                <a:solidFill>
+                  <a:srgbClr val="8B0000"/>
+                </a:solidFill>
+              </a:rPr>
+              <a:t>Python 代码示例</a:t>
+            </a:r>
+          </a:p>
+        </p:txBody>
+      </p:sp>
+      <p:sp>
+        <p:nvSpPr>
+          <p:cNvPr id="3" name="TextBox 2"/>
+          <p:cNvSpPr txBox="1"/>
+          <p:nvPr/>
+        </p:nvSpPr>
+        <p:spPr>
+          <a:xfrm>
+            <a:off x="914400" y="1371600"/>
+            <a:ext cx="10058400" cy="5029200"/>
+          </a:xfrm>
+          <a:prstGeom prst="rect">
+            <a:avLst/>
+          </a:prstGeom>
+          <a:noFill/>
+        </p:spPr>
+        <p:txBody>
+          <a:bodyPr wrap="none">
+            <a:spAutoFit/>
+          </a:bodyPr>
+          <a:lstStyle/>
+          <a:p/>
+          <a:p>
+            <a:r>
+              <a:rPr sz="1400">
+                <a:solidFill>
+                  <a:srgbClr val="000000"/>
+                </a:solidFill>
+              </a:rPr>
+              <a:t>x = int(input())
+if x &gt; 0:
+    print('正数')
+elif x &lt; 0:
+    print('负数')
+else:
+    print('零')</a:t>
+            </a:r>
+          </a:p>
+        </p:txBody>
+      </p:sp>
+    </p:spTree>
+  </p:cSld>
+  <p:clrMapOvr>
+    <a:masterClrMapping/>
+  </p:clrMapOvr>
+</p:sld>
+</file>
+
+<file path=ppt/slides/slide6.xml><?xml version="1.0" encoding="utf-8"?>
+<p:sld xmlns:a="http://schemas.openxmlformats.org/drawingml/2006/main" xmlns:p="http://schemas.openxmlformats.org/presentationml/2006/main" xmlns:r="http://schemas.openxmlformats.org/officeDocument/2006/relationships">
+  <p:cSld>
+    <p:spTree>
+      <p:nvGrpSpPr>
+        <p:cNvPr id="1" name=""/>
+        <p:cNvGrpSpPr/>
+        <p:nvPr/>
+      </p:nvGrpSpPr>
+      <p:grpSpPr/>
+      <p:sp>
+        <p:nvSpPr>
+          <p:cNvPr id="2" name="TextBox 1"/>
+          <p:cNvSpPr txBox="1"/>
+          <p:nvPr/>
+        </p:nvSpPr>
+        <p:spPr>
+          <a:xfrm>
+            <a:off x="914400" y="457200"/>
+            <a:ext cx="10058400" cy="914400"/>
+          </a:xfrm>
+          <a:prstGeom prst="rect">
+            <a:avLst/>
+          </a:prstGeom>
+          <a:noFill/>
+        </p:spPr>
+        <p:txBody>
+          <a:bodyPr wrap="none">
+            <a:spAutoFit/>
+          </a:bodyPr>
+          <a:lstStyle/>
+          <a:p>
+            <a:r>
+              <a:rPr sz="2800" b="1">
+                <a:solidFill>
+                  <a:srgbClr val="8B0000"/>
+                </a:solidFill>
+              </a:rPr>
+              <a:t>常见错误</a:t>
+            </a:r>
+          </a:p>
+        </p:txBody>
+      </p:sp>
+      <p:sp>
+        <p:nvSpPr>
+          <p:cNvPr id="3" name="TextBox 2"/>
+          <p:cNvSpPr txBox="1"/>
+          <p:nvPr/>
+        </p:nvSpPr>
+        <p:spPr>
+          <a:xfrm>
+            <a:off x="914400" y="1371600"/>
+            <a:ext cx="10058400" cy="5029200"/>
+          </a:xfrm>
+          <a:prstGeom prst="rect">
+            <a:avLst/>
+          </a:prstGeom>
+          <a:noFill/>
+        </p:spPr>
+        <p:txBody>
+          <a:bodyPr wrap="none">
+            <a:spAutoFit/>
+          </a:bodyPr>
+          <a:lstStyle/>
+          <a:p/>
+          <a:p>
+            <a:r>
+              <a:rPr sz="1600">
+                <a:solidFill>
+                  <a:srgbClr val="000000"/>
+                </a:solidFill>
+              </a:rPr>
+              <a:t>用 = 而不是 == 做比较</a:t>
+            </a:r>
+          </a:p>
+          <a:p>
+            <a:r>
+              <a:rPr sz="1600">
+                <a:solidFill>
+                  <a:srgbClr val="000000"/>
+                </a:solidFill>
+              </a:rPr>
+              <a:t>浮点数不能用 == 比较</a:t>
+            </a:r>
+          </a:p>
+          <a:p>
+            <a:r>
+              <a:rPr sz="1600">
+                <a:solidFill>
+                  <a:srgbClr val="000000"/>
+                </a:solidFill>
+              </a:rPr>
+              <a:t>else if vs elif（C++/Python区别）</a:t>
+            </a:r>
+          </a:p>
+          <a:p>
+            <a:r>
+              <a:rPr sz="1600">
+                <a:solidFill>
+                  <a:srgbClr val="000000"/>
+                </a:solidFill>
+              </a:rPr>
+              <a:t>忘记处理边界情况</a:t>
+            </a:r>
+          </a:p>
+        </p:txBody>
+      </p:sp>
+    </p:spTree>
+  </p:cSld>
+  <p:clrMapOvr>
+    <a:masterClrMapping/>
+  </p:clrMapOvr>
+</p:sld>
+</file>
+
+<file path=ppt/slides/slide7.xml><?xml version="1.0" encoding="utf-8"?>
+<p:sld xmlns:a="http://schemas.openxmlformats.org/drawingml/2006/main" xmlns:p="http://schemas.openxmlformats.org/presentationml/2006/main" xmlns:r="http://schemas.openxmlformats.org/officeDocument/2006/relationships">
+  <p:cSld>
+    <p:spTree>
+      <p:nvGrpSpPr>
+        <p:cNvPr id="1" name=""/>
+        <p:cNvGrpSpPr/>
+        <p:nvPr/>
+      </p:nvGrpSpPr>
+      <p:grpSpPr/>
+      <p:sp>
+        <p:nvSpPr>
+          <p:cNvPr id="2" name="TextBox 1"/>
+          <p:cNvSpPr txBox="1"/>
+          <p:nvPr/>
+        </p:nvSpPr>
+        <p:spPr>
+          <a:xfrm>
+            <a:off x="914400" y="457200"/>
+            <a:ext cx="10058400" cy="914400"/>
+          </a:xfrm>
+          <a:prstGeom prst="rect">
+            <a:avLst/>
+          </a:prstGeom>
+          <a:noFill/>
+        </p:spPr>
+        <p:txBody>
+          <a:bodyPr wrap="none">
+            <a:spAutoFit/>
+          </a:bodyPr>
+          <a:lstStyle/>
+          <a:p>
+            <a:r>
+              <a:rPr sz="2800" b="1">
+                <a:solidFill>
+                  <a:srgbClr val="8B0000"/>
+                </a:solidFill>
+              </a:rPr>
+              <a:t>练习题目</a:t>
+            </a:r>
+          </a:p>
+        </p:txBody>
+      </p:sp>
+      <p:sp>
+        <p:nvSpPr>
+          <p:cNvPr id="3" name="TextBox 2"/>
+          <p:cNvSpPr txBox="1"/>
+          <p:nvPr/>
+        </p:nvSpPr>
+        <p:spPr>
+          <a:xfrm>
+            <a:off x="914400" y="1371600"/>
+            <a:ext cx="10058400" cy="5029200"/>
+          </a:xfrm>
+          <a:prstGeom prst="rect">
+            <a:avLst/>
+          </a:prstGeom>
+          <a:noFill/>
+        </p:spPr>
+        <p:txBody>
+          <a:bodyPr wrap="none">
+            <a:spAutoFit/>
+          </a:bodyPr>
+          <a:lstStyle/>
+          <a:p/>
+          <a:p>
+            <a:r>
+              <a:rPr sz="1600">
+                <a:solidFill>
+                  <a:srgbClr val="000000"/>
+                </a:solidFill>
+              </a:rPr>
+              <a:t>JD015 石碑之谜</a:t>
+            </a:r>
+          </a:p>
+          <a:p>
+            <a:r>
+              <a:rPr sz="1600">
+                <a:solidFill>
+                  <a:srgbClr val="000000"/>
+                </a:solidFill>
+              </a:rPr>
+              <a:t>JD018 三石排序</a:t>
+            </a:r>
+          </a:p>
+          <a:p>
+            <a:r>
+              <a:rPr sz="1600">
+                <a:solidFill>
+                  <a:srgbClr val="000000"/>
+                </a:solidFill>
+              </a:rPr>
+              <a:t>JD021 沙盘点位</a:t>
+            </a:r>
+          </a:p>
+        </p:txBody>
+      </p:sp>
+    </p:spTree>
+  </p:cSld>
+  <p:clrMapOvr>
+    <a:masterClrMapping/>
+  </p:clrMapOvr>
+</p:sld>
+</file>
+
+<file path=ppt/slides/slide8.xml><?xml version="1.0" encoding="utf-8"?>
+<p:sld xmlns:a="http://schemas.openxmlformats.org/drawingml/2006/main" xmlns:p="http://schemas.openxmlformats.org/presentationml/2006/main" xmlns:r="http://schemas.openxmlformats.org/officeDocument/2006/relationships">
+  <p:cSld>
+    <p:spTree>
+      <p:nvGrpSpPr>
+        <p:cNvPr id="1" name=""/>
+        <p:cNvGrpSpPr/>
+        <p:nvPr/>
+      </p:nvGrpSpPr>
+      <p:grpSpPr/>
+      <p:sp>
+        <p:nvSpPr>
+          <p:cNvPr id="2" name="TextBox 1"/>
+          <p:cNvSpPr txBox="1"/>
+          <p:nvPr/>
+        </p:nvSpPr>
+        <p:spPr>
+          <a:xfrm>
+            <a:off x="914400" y="457200"/>
+            <a:ext cx="10058400" cy="914400"/>
+          </a:xfrm>
+          <a:prstGeom prst="rect">
+            <a:avLst/>
+          </a:prstGeom>
+          <a:noFill/>
+        </p:spPr>
+        <p:txBody>
+          <a:bodyPr wrap="none">
+            <a:spAutoFit/>
+          </a:bodyPr>
+          <a:lstStyle/>
+          <a:p>
+            <a:r>
+              <a:rPr sz="2800" b="1">
+                <a:solidFill>
+                  <a:srgbClr val="8B0000"/>
+                </a:solidFill>
+              </a:rPr>
+              <a:t>本章小结</a:t>
+            </a:r>
+          </a:p>
+        </p:txBody>
+      </p:sp>
+      <p:sp>
+        <p:nvSpPr>
+          <p:cNvPr id="3" name="TextBox 2"/>
+          <p:cNvSpPr txBox="1"/>
+          <p:nvPr/>
+        </p:nvSpPr>
+        <p:spPr>
+          <a:xfrm>
+            <a:off x="914400" y="1371600"/>
+            <a:ext cx="10058400" cy="5029200"/>
+          </a:xfrm>
+          <a:prstGeom prst="rect">
+            <a:avLst/>
+          </a:prstGeom>
+          <a:noFill/>
+        </p:spPr>
+        <p:txBody>
+          <a:bodyPr wrap="none">
+            <a:spAutoFit/>
+          </a:bodyPr>
+          <a:lstStyle/>
+          <a:p/>
+          <a:p>
+            <a:r>
+              <a:rPr sz="1600">
+                <a:solidFill>
+                  <a:srgbClr val="000000"/>
+                </a:solidFill>
+              </a:rPr>
+              <a:t>掌握核心概念</a:t>
+            </a:r>
+          </a:p>
+          <a:p>
+            <a:r>
+              <a:rPr sz="1600">
+                <a:solidFill>
+                  <a:srgbClr val="000000"/>
+                </a:solidFill>
+              </a:rPr>
+              <a:t>多做练习</a:t>
+            </a:r>
+          </a:p>
+          <a:p>
+            <a:r>
+              <a:rPr sz="1600">
+                <a:solidFill>
+                  <a:srgbClr val="000000"/>
+                </a:solidFill>
+              </a:rPr>
+              <a:t>注意边界条件</a:t>
+            </a:r>
+          </a:p>
+          <a:p>
+            <a:r>
+              <a:rPr sz="1600">
+                <a:solidFill>
+                  <a:srgbClr val="000000"/>
+                </a:solidFill>
+              </a:rPr>
+              <a:t>理解算法思想而非死记代码</a:t>
             </a:r>
           </a:p>
         </p:txBody>

--- a/textbook/ppt/chapter02_ppt.pptx
+++ b/textbook/ppt/chapter02_ppt.pptx
@@ -12,7 +12,6 @@
     <p:sldId id="260" r:id="rId11"/>
     <p:sldId id="261" r:id="rId12"/>
     <p:sldId id="262" r:id="rId13"/>
-    <p:sldId id="263" r:id="rId14"/>
   </p:sldIdLst>
   <p:sldSz cx="12188952" cy="6858000" type="screen4x3"/>
   <p:notesSz cx="6858000" cy="9144000"/>
@@ -3124,18 +3123,7 @@
                   <a:srgbClr val="8B0000"/>
                 </a:solidFill>
               </a:rPr>
-              <a:t>第2章 歧路逢生</a:t>
-            </a:r>
-          </a:p>
-          <a:p>
-            <a:pPr algn="ctr"/>
-            <a:r>
-              <a:rPr sz="2400">
-                <a:solidFill>
-                  <a:srgbClr val="6B5D4D"/>
-                </a:solidFill>
-              </a:rPr>
-              <a:t>条件判断与分支</a:t>
+              <a:t>第2章</a:t>
             </a:r>
           </a:p>
         </p:txBody>
@@ -3166,8 +3154,8 @@
         </p:nvSpPr>
         <p:spPr>
           <a:xfrm>
-            <a:off x="914400" y="457200"/>
-            <a:ext cx="10058400" cy="914400"/>
+            <a:off x="457200" y="274320"/>
+            <a:ext cx="10972800" cy="731520"/>
           </a:xfrm>
           <a:prstGeom prst="rect">
             <a:avLst/>
@@ -3181,7 +3169,7 @@
           <a:lstStyle/>
           <a:p>
             <a:r>
-              <a:rPr sz="2800" b="1">
+              <a:rPr sz="2400" b="1">
                 <a:solidFill>
                   <a:srgbClr val="8B0000"/>
                 </a:solidFill>
@@ -3199,8 +3187,8 @@
         </p:nvSpPr>
         <p:spPr>
           <a:xfrm>
-            <a:off x="914400" y="1371600"/>
-            <a:ext cx="10058400" cy="4572000"/>
+            <a:off x="457200" y="1097280"/>
+            <a:ext cx="10972800" cy="5029200"/>
           </a:xfrm>
           <a:prstGeom prst="rect">
             <a:avLst/>
@@ -3215,26 +3203,42 @@
           <a:p/>
           <a:p>
             <a:r>
-              <a:rPr sz="1800"/>
-              <a:t>• if/else 语句的基本概念与应用</a:t>
-            </a:r>
-          </a:p>
-          <a:p>
-            <a:r>
-              <a:rPr sz="1800"/>
-              <a:t>• 逻辑运算符的基本概念与应用</a:t>
-            </a:r>
-          </a:p>
-          <a:p>
-            <a:r>
-              <a:rPr sz="1800"/>
-              <a:t>• 嵌套条件的基本概念与应用</a:t>
-            </a:r>
-          </a:p>
-          <a:p>
-            <a:r>
-              <a:rPr sz="1800"/>
-              <a:t>• switch-case的基本概念与应用</a:t>
+              <a:rPr sz="1400">
+                <a:solidFill>
+                  <a:srgbClr val="000000"/>
+                </a:solidFill>
+              </a:rPr>
+              <a:t>if 条件为真才执行，else 否则执行</a:t>
+            </a:r>
+          </a:p>
+          <a:p>
+            <a:r>
+              <a:rPr sz="1400">
+                <a:solidFill>
+                  <a:srgbClr val="000000"/>
+                </a:solidFill>
+              </a:rPr>
+              <a:t>else if 多分支判断</a:t>
+            </a:r>
+          </a:p>
+          <a:p>
+            <a:r>
+              <a:rPr sz="1400">
+                <a:solidFill>
+                  <a:srgbClr val="000000"/>
+                </a:solidFill>
+              </a:rPr>
+              <a:t>&amp;&amp; (与)：两个都为真，|| (或)：至少一个为真</a:t>
+            </a:r>
+          </a:p>
+          <a:p>
+            <a:r>
+              <a:rPr sz="1400">
+                <a:solidFill>
+                  <a:srgbClr val="000000"/>
+                </a:solidFill>
+              </a:rPr>
+              <a:t>嵌套条件：条件里面再套条件</a:t>
             </a:r>
           </a:p>
         </p:txBody>
@@ -3265,8 +3269,8 @@
         </p:nvSpPr>
         <p:spPr>
           <a:xfrm>
-            <a:off x="914400" y="457200"/>
-            <a:ext cx="10058400" cy="914400"/>
+            <a:off x="457200" y="274320"/>
+            <a:ext cx="10972800" cy="731520"/>
           </a:xfrm>
           <a:prstGeom prst="rect">
             <a:avLst/>
@@ -3280,12 +3284,12 @@
           <a:lstStyle/>
           <a:p>
             <a:r>
-              <a:rPr sz="2800" b="1">
+              <a:rPr sz="2400" b="1">
                 <a:solidFill>
                   <a:srgbClr val="8B0000"/>
                 </a:solidFill>
               </a:rPr>
-              <a:t>本章概览</a:t>
+              <a:t>C++ 代码示例</a:t>
             </a:r>
           </a:p>
         </p:txBody>
@@ -3298,8 +3302,8 @@
         </p:nvSpPr>
         <p:spPr>
           <a:xfrm>
-            <a:off x="914400" y="1371600"/>
-            <a:ext cx="10058400" cy="5029200"/>
+            <a:off x="457200" y="1097280"/>
+            <a:ext cx="10972800" cy="5029200"/>
           </a:xfrm>
           <a:prstGeom prst="rect">
             <a:avLst/>
@@ -3314,42 +3318,17 @@
           <a:p/>
           <a:p>
             <a:r>
-              <a:rPr sz="1600">
+              <a:rPr sz="1200">
                 <a:solidFill>
                   <a:srgbClr val="000000"/>
                 </a:solidFill>
               </a:rPr>
-              <a:t>if/else 条件判断</a:t>
-            </a:r>
-          </a:p>
-          <a:p>
-            <a:r>
-              <a:rPr sz="1600">
-                <a:solidFill>
-                  <a:srgbClr val="000000"/>
-                </a:solidFill>
-              </a:rPr>
-              <a:t>逻辑运算符：&amp;&amp;(与)、||(或)、!(非)</a:t>
-            </a:r>
-          </a:p>
-          <a:p>
-            <a:r>
-              <a:rPr sz="1600">
-                <a:solidFill>
-                  <a:srgbClr val="000000"/>
-                </a:solidFill>
-              </a:rPr>
-              <a:t>嵌套条件：if...else if...else</a:t>
-            </a:r>
-          </a:p>
-          <a:p>
-            <a:r>
-              <a:rPr sz="1600">
-                <a:solidFill>
-                  <a:srgbClr val="000000"/>
-                </a:solidFill>
-              </a:rPr>
-              <a:t>switch-case（C++特有）</a:t>
+              <a:t>int score;
+cin &gt;&gt; score;
+if (score &gt;= 90) cout &lt;&lt; "A" &lt;&lt; endl;
+else if (score &gt;= 80) cout &lt;&lt; "B" &lt;&lt; endl;
+else if (score &gt;= 70) cout &lt;&lt; "C" &lt;&lt; endl;
+else cout &lt;&lt; "D" &lt;&lt; endl;</a:t>
             </a:r>
           </a:p>
         </p:txBody>
@@ -3380,8 +3359,8 @@
         </p:nvSpPr>
         <p:spPr>
           <a:xfrm>
-            <a:off x="914400" y="457200"/>
-            <a:ext cx="10058400" cy="914400"/>
+            <a:off x="457200" y="274320"/>
+            <a:ext cx="10972800" cy="731520"/>
           </a:xfrm>
           <a:prstGeom prst="rect">
             <a:avLst/>
@@ -3395,12 +3374,12 @@
           <a:lstStyle/>
           <a:p>
             <a:r>
-              <a:rPr sz="2800" b="1">
+              <a:rPr sz="2400" b="1">
                 <a:solidFill>
                   <a:srgbClr val="8B0000"/>
                 </a:solidFill>
               </a:rPr>
-              <a:t>C++ 代码示例</a:t>
+              <a:t>Python 代码示例</a:t>
             </a:r>
           </a:p>
         </p:txBody>
@@ -3413,8 +3392,8 @@
         </p:nvSpPr>
         <p:spPr>
           <a:xfrm>
-            <a:off x="914400" y="1371600"/>
-            <a:ext cx="10058400" cy="5029200"/>
+            <a:off x="457200" y="1097280"/>
+            <a:ext cx="10972800" cy="5029200"/>
           </a:xfrm>
           <a:prstGeom prst="rect">
             <a:avLst/>
@@ -3429,16 +3408,20 @@
           <a:p/>
           <a:p>
             <a:r>
-              <a:rPr sz="1400">
+              <a:rPr sz="1200">
                 <a:solidFill>
                   <a:srgbClr val="000000"/>
                 </a:solidFill>
               </a:rPr>
-              <a:t>int x;
-cin &gt;&gt; x;
-if (x &gt; 0) cout &lt;&lt; "正数";
-else if (x &lt; 0) cout &lt;&lt; "负数";
-else cout &lt;&lt; "零";</a:t>
+              <a:t>score = int(input())
+if score &gt;= 90:
+    print('A')
+elif score &gt;= 80:
+    print('B')
+elif score &gt;= 70:
+    print('C')
+else:
+    print('D')</a:t>
             </a:r>
           </a:p>
         </p:txBody>
@@ -3469,8 +3452,8 @@
         </p:nvSpPr>
         <p:spPr>
           <a:xfrm>
-            <a:off x="914400" y="457200"/>
-            <a:ext cx="10058400" cy="914400"/>
+            <a:off x="457200" y="274320"/>
+            <a:ext cx="10972800" cy="731520"/>
           </a:xfrm>
           <a:prstGeom prst="rect">
             <a:avLst/>
@@ -3484,12 +3467,12 @@
           <a:lstStyle/>
           <a:p>
             <a:r>
-              <a:rPr sz="2800" b="1">
+              <a:rPr sz="2400" b="1">
                 <a:solidFill>
                   <a:srgbClr val="8B0000"/>
                 </a:solidFill>
               </a:rPr>
-              <a:t>Python 代码示例</a:t>
+              <a:t>常见错误</a:t>
             </a:r>
           </a:p>
         </p:txBody>
@@ -3502,8 +3485,8 @@
         </p:nvSpPr>
         <p:spPr>
           <a:xfrm>
-            <a:off x="914400" y="1371600"/>
-            <a:ext cx="10058400" cy="5029200"/>
+            <a:off x="457200" y="1097280"/>
+            <a:ext cx="10972800" cy="5029200"/>
           </a:xfrm>
           <a:prstGeom prst="rect">
             <a:avLst/>
@@ -3523,13 +3506,37 @@
                   <a:srgbClr val="000000"/>
                 </a:solidFill>
               </a:rPr>
-              <a:t>x = int(input())
-if x &gt; 0:
-    print('正数')
-elif x &lt; 0:
-    print('负数')
-else:
-    print('零')</a:t>
+              <a:t>if x = 5 赋值，不是比较！要用 x == 5</a:t>
+            </a:r>
+          </a:p>
+          <a:p>
+            <a:r>
+              <a:rPr sz="1400">
+                <a:solidFill>
+                  <a:srgbClr val="000000"/>
+                </a:solidFill>
+              </a:rPr>
+              <a:t>浮点数不能用 == 比较：0.1+0.2 != 0.3</a:t>
+            </a:r>
+          </a:p>
+          <a:p>
+            <a:r>
+              <a:rPr sz="1400">
+                <a:solidFill>
+                  <a:srgbClr val="000000"/>
+                </a:solidFill>
+              </a:rPr>
+              <a:t>else if (C++) vs elif (Python)，别搞混</a:t>
+            </a:r>
+          </a:p>
+          <a:p>
+            <a:r>
+              <a:rPr sz="1400">
+                <a:solidFill>
+                  <a:srgbClr val="000000"/>
+                </a:solidFill>
+              </a:rPr>
+              <a:t>忘记处理边界：score &lt; 0 怎么办？</a:t>
             </a:r>
           </a:p>
         </p:txBody>
@@ -3560,8 +3567,8 @@
         </p:nvSpPr>
         <p:spPr>
           <a:xfrm>
-            <a:off x="914400" y="457200"/>
-            <a:ext cx="10058400" cy="914400"/>
+            <a:off x="457200" y="274320"/>
+            <a:ext cx="10972800" cy="731520"/>
           </a:xfrm>
           <a:prstGeom prst="rect">
             <a:avLst/>
@@ -3575,12 +3582,12 @@
           <a:lstStyle/>
           <a:p>
             <a:r>
-              <a:rPr sz="2800" b="1">
+              <a:rPr sz="2400" b="1">
                 <a:solidFill>
                   <a:srgbClr val="8B0000"/>
                 </a:solidFill>
               </a:rPr>
-              <a:t>常见错误</a:t>
+              <a:t>练习题目</a:t>
             </a:r>
           </a:p>
         </p:txBody>
@@ -3593,8 +3600,8 @@
         </p:nvSpPr>
         <p:spPr>
           <a:xfrm>
-            <a:off x="914400" y="1371600"/>
-            <a:ext cx="10058400" cy="5029200"/>
+            <a:off x="457200" y="1097280"/>
+            <a:ext cx="10972800" cy="5029200"/>
           </a:xfrm>
           <a:prstGeom prst="rect">
             <a:avLst/>
@@ -3609,42 +3616,32 @@
           <a:p/>
           <a:p>
             <a:r>
-              <a:rPr sz="1600">
+              <a:rPr sz="1400">
                 <a:solidFill>
                   <a:srgbClr val="000000"/>
                 </a:solidFill>
               </a:rPr>
-              <a:t>用 = 而不是 == 做比较</a:t>
-            </a:r>
-          </a:p>
-          <a:p>
-            <a:r>
-              <a:rPr sz="1600">
+              <a:t>JD015 石碑之谜 - 倍数判断 (Easy)</a:t>
+            </a:r>
+          </a:p>
+          <a:p>
+            <a:r>
+              <a:rPr sz="1400">
                 <a:solidFill>
                   <a:srgbClr val="000000"/>
                 </a:solidFill>
               </a:rPr>
-              <a:t>浮点数不能用 == 比较</a:t>
-            </a:r>
-          </a:p>
-          <a:p>
-            <a:r>
-              <a:rPr sz="1600">
+              <a:t>JD018 三石排序 - 三个数排序 (Easy)</a:t>
+            </a:r>
+          </a:p>
+          <a:p>
+            <a:r>
+              <a:rPr sz="1400">
                 <a:solidFill>
                   <a:srgbClr val="000000"/>
                 </a:solidFill>
               </a:rPr>
-              <a:t>else if vs elif（C++/Python区别）</a:t>
-            </a:r>
-          </a:p>
-          <a:p>
-            <a:r>
-              <a:rPr sz="1600">
-                <a:solidFill>
-                  <a:srgbClr val="000000"/>
-                </a:solidFill>
-              </a:rPr>
-              <a:t>忘记处理边界情况</a:t>
+              <a:t>JD021 沙盘点位 - 象限判断 (Medium)</a:t>
             </a:r>
           </a:p>
         </p:txBody>
@@ -3675,8 +3672,8 @@
         </p:nvSpPr>
         <p:spPr>
           <a:xfrm>
-            <a:off x="914400" y="457200"/>
-            <a:ext cx="10058400" cy="914400"/>
+            <a:off x="457200" y="274320"/>
+            <a:ext cx="10972800" cy="731520"/>
           </a:xfrm>
           <a:prstGeom prst="rect">
             <a:avLst/>
@@ -3690,12 +3687,12 @@
           <a:lstStyle/>
           <a:p>
             <a:r>
-              <a:rPr sz="2800" b="1">
+              <a:rPr sz="2400" b="1">
                 <a:solidFill>
                   <a:srgbClr val="8B0000"/>
                 </a:solidFill>
               </a:rPr>
-              <a:t>练习题目</a:t>
+              <a:t>本章小结</a:t>
             </a:r>
           </a:p>
         </p:txBody>
@@ -3708,8 +3705,8 @@
         </p:nvSpPr>
         <p:spPr>
           <a:xfrm>
-            <a:off x="914400" y="1371600"/>
-            <a:ext cx="10058400" cy="5029200"/>
+            <a:off x="457200" y="1097280"/>
+            <a:ext cx="10972800" cy="5029200"/>
           </a:xfrm>
           <a:prstGeom prst="rect">
             <a:avLst/>
@@ -3724,147 +3721,42 @@
           <a:p/>
           <a:p>
             <a:r>
-              <a:rPr sz="1600">
+              <a:rPr sz="1400">
                 <a:solidFill>
                   <a:srgbClr val="000000"/>
                 </a:solidFill>
               </a:rPr>
-              <a:t>JD015 石碑之谜</a:t>
-            </a:r>
-          </a:p>
-          <a:p>
-            <a:r>
-              <a:rPr sz="1600">
+              <a:t>本章学习了第2章的核心概念</a:t>
+            </a:r>
+          </a:p>
+          <a:p>
+            <a:r>
+              <a:rPr sz="1400">
                 <a:solidFill>
                   <a:srgbClr val="000000"/>
                 </a:solidFill>
               </a:rPr>
-              <a:t>JD018 三石排序</a:t>
-            </a:r>
-          </a:p>
-          <a:p>
-            <a:r>
-              <a:rPr sz="1600">
+              <a:t>多做练习是掌握算法的关键</a:t>
+            </a:r>
+          </a:p>
+          <a:p>
+            <a:r>
+              <a:rPr sz="1400">
                 <a:solidFill>
                   <a:srgbClr val="000000"/>
                 </a:solidFill>
               </a:rPr>
-              <a:t>JD021 沙盘点位</a:t>
-            </a:r>
-          </a:p>
-        </p:txBody>
-      </p:sp>
-    </p:spTree>
-  </p:cSld>
-  <p:clrMapOvr>
-    <a:masterClrMapping/>
-  </p:clrMapOvr>
-</p:sld>
-</file>
-
-<file path=ppt/slides/slide8.xml><?xml version="1.0" encoding="utf-8"?>
-<p:sld xmlns:a="http://schemas.openxmlformats.org/drawingml/2006/main" xmlns:p="http://schemas.openxmlformats.org/presentationml/2006/main" xmlns:r="http://schemas.openxmlformats.org/officeDocument/2006/relationships">
-  <p:cSld>
-    <p:spTree>
-      <p:nvGrpSpPr>
-        <p:cNvPr id="1" name=""/>
-        <p:cNvGrpSpPr/>
-        <p:nvPr/>
-      </p:nvGrpSpPr>
-      <p:grpSpPr/>
-      <p:sp>
-        <p:nvSpPr>
-          <p:cNvPr id="2" name="TextBox 1"/>
-          <p:cNvSpPr txBox="1"/>
-          <p:nvPr/>
-        </p:nvSpPr>
-        <p:spPr>
-          <a:xfrm>
-            <a:off x="914400" y="457200"/>
-            <a:ext cx="10058400" cy="914400"/>
-          </a:xfrm>
-          <a:prstGeom prst="rect">
-            <a:avLst/>
-          </a:prstGeom>
-          <a:noFill/>
-        </p:spPr>
-        <p:txBody>
-          <a:bodyPr wrap="none">
-            <a:spAutoFit/>
-          </a:bodyPr>
-          <a:lstStyle/>
-          <a:p>
-            <a:r>
-              <a:rPr sz="2800" b="1">
-                <a:solidFill>
-                  <a:srgbClr val="8B0000"/>
+              <a:t>理解算法思想比死记代码更重要</a:t>
+            </a:r>
+          </a:p>
+          <a:p>
+            <a:r>
+              <a:rPr sz="1400">
+                <a:solidFill>
+                  <a:srgbClr val="000000"/>
                 </a:solidFill>
               </a:rPr>
-              <a:t>本章小结</a:t>
-            </a:r>
-          </a:p>
-        </p:txBody>
-      </p:sp>
-      <p:sp>
-        <p:nvSpPr>
-          <p:cNvPr id="3" name="TextBox 2"/>
-          <p:cNvSpPr txBox="1"/>
-          <p:nvPr/>
-        </p:nvSpPr>
-        <p:spPr>
-          <a:xfrm>
-            <a:off x="914400" y="1371600"/>
-            <a:ext cx="10058400" cy="5029200"/>
-          </a:xfrm>
-          <a:prstGeom prst="rect">
-            <a:avLst/>
-          </a:prstGeom>
-          <a:noFill/>
-        </p:spPr>
-        <p:txBody>
-          <a:bodyPr wrap="none">
-            <a:spAutoFit/>
-          </a:bodyPr>
-          <a:lstStyle/>
-          <a:p/>
-          <a:p>
-            <a:r>
-              <a:rPr sz="1600">
-                <a:solidFill>
-                  <a:srgbClr val="000000"/>
-                </a:solidFill>
-              </a:rPr>
-              <a:t>掌握核心概念</a:t>
-            </a:r>
-          </a:p>
-          <a:p>
-            <a:r>
-              <a:rPr sz="1600">
-                <a:solidFill>
-                  <a:srgbClr val="000000"/>
-                </a:solidFill>
-              </a:rPr>
-              <a:t>多做练习</a:t>
-            </a:r>
-          </a:p>
-          <a:p>
-            <a:r>
-              <a:rPr sz="1600">
-                <a:solidFill>
-                  <a:srgbClr val="000000"/>
-                </a:solidFill>
-              </a:rPr>
-              <a:t>注意边界条件</a:t>
-            </a:r>
-          </a:p>
-          <a:p>
-            <a:r>
-              <a:rPr sz="1600">
-                <a:solidFill>
-                  <a:srgbClr val="000000"/>
-                </a:solidFill>
-              </a:rPr>
-              <a:t>理解算法思想而非死记代码</a:t>
+              <a:t>遇到问题先画图、再想算法、最后写代码</a:t>
             </a:r>
           </a:p>
         </p:txBody>

--- a/textbook/ppt/chapter02_ppt.pptx
+++ b/textbook/ppt/chapter02_ppt.pptx
@@ -12,6 +12,7 @@
     <p:sldId id="260" r:id="rId11"/>
     <p:sldId id="261" r:id="rId12"/>
     <p:sldId id="262" r:id="rId13"/>
+    <p:sldId id="263" r:id="rId14"/>
   </p:sldIdLst>
   <p:sldSz cx="12188952" cy="6858000" type="screen4x3"/>
   <p:notesSz cx="6858000" cy="9144000"/>
@@ -3757,6 +3758,91 @@
                 </a:solidFill>
               </a:rPr>
               <a:t>遇到问题先画图、再想算法、最后写代码</a:t>
+            </a:r>
+          </a:p>
+        </p:txBody>
+      </p:sp>
+    </p:spTree>
+  </p:cSld>
+  <p:clrMapOvr>
+    <a:masterClrMapping/>
+  </p:clrMapOvr>
+</p:sld>
+</file>
+
+<file path=ppt/slides/slide8.xml><?xml version="1.0" encoding="utf-8"?>
+<p:sld xmlns:a="http://schemas.openxmlformats.org/drawingml/2006/main" xmlns:p="http://schemas.openxmlformats.org/presentationml/2006/main" xmlns:r="http://schemas.openxmlformats.org/officeDocument/2006/relationships">
+  <p:cSld>
+    <p:spTree>
+      <p:nvGrpSpPr>
+        <p:cNvPr id="1" name=""/>
+        <p:cNvGrpSpPr/>
+        <p:nvPr/>
+      </p:nvGrpSpPr>
+      <p:grpSpPr/>
+      <p:sp>
+        <p:nvSpPr>
+          <p:cNvPr id="2" name="TextBox 1"/>
+          <p:cNvSpPr txBox="1"/>
+          <p:nvPr/>
+        </p:nvSpPr>
+        <p:spPr>
+          <a:xfrm>
+            <a:off x="457200" y="274320"/>
+            <a:ext cx="10972800" cy="731520"/>
+          </a:xfrm>
+          <a:prstGeom prst="rect">
+            <a:avLst/>
+          </a:prstGeom>
+          <a:noFill/>
+        </p:spPr>
+        <p:txBody>
+          <a:bodyPr wrap="none">
+            <a:spAutoFit/>
+          </a:bodyPr>
+          <a:lstStyle/>
+          <a:p>
+            <a:r>
+              <a:rPr sz="2400" b="1">
+                <a:solidFill>
+                  <a:srgbClr val="8B0000"/>
+                </a:solidFill>
+              </a:rPr>
+              <a:t>本章概览</a:t>
+            </a:r>
+          </a:p>
+        </p:txBody>
+      </p:sp>
+      <p:sp>
+        <p:nvSpPr>
+          <p:cNvPr id="3" name="TextBox 2"/>
+          <p:cNvSpPr txBox="1"/>
+          <p:nvPr/>
+        </p:nvSpPr>
+        <p:spPr>
+          <a:xfrm>
+            <a:off x="457200" y="1097280"/>
+            <a:ext cx="10972800" cy="5029200"/>
+          </a:xfrm>
+          <a:prstGeom prst="rect">
+            <a:avLst/>
+          </a:prstGeom>
+          <a:noFill/>
+        </p:spPr>
+        <p:txBody>
+          <a:bodyPr wrap="none">
+            <a:spAutoFit/>
+          </a:bodyPr>
+          <a:lstStyle/>
+          <a:p/>
+          <a:p>
+            <a:r>
+              <a:rPr sz="1600">
+                <a:solidFill>
+                  <a:srgbClr val="000000"/>
+                </a:solidFill>
+              </a:rPr>
+              <a:t>本章学习条件判断——让程序根据不同的条件做出不同的选择。if/else、逻辑运算符是核心。</a:t>
             </a:r>
           </a:p>
         </p:txBody>

--- a/textbook/ppt/chapter02_ppt.pptx
+++ b/textbook/ppt/chapter02_ppt.pptx
@@ -13,6 +13,7 @@
     <p:sldId id="261" r:id="rId12"/>
     <p:sldId id="262" r:id="rId13"/>
     <p:sldId id="263" r:id="rId14"/>
+    <p:sldId id="264" r:id="rId15"/>
   </p:sldIdLst>
   <p:sldSz cx="12188952" cy="6858000" type="screen4x3"/>
   <p:notesSz cx="6858000" cy="9144000"/>
@@ -3727,7 +3728,7 @@
                   <a:srgbClr val="000000"/>
                 </a:solidFill>
               </a:rPr>
-              <a:t>本章学习了第2章的核心概念</a:t>
+              <a:t/>
             </a:r>
           </a:p>
           <a:p>
@@ -3737,7 +3738,7 @@
                   <a:srgbClr val="000000"/>
                 </a:solidFill>
               </a:rPr>
-              <a:t>多做练习是掌握算法的关键</a:t>
+              <a:t/>
             </a:r>
           </a:p>
           <a:p>
@@ -3747,7 +3748,7 @@
                   <a:srgbClr val="000000"/>
                 </a:solidFill>
               </a:rPr>
-              <a:t>理解算法思想比死记代码更重要</a:t>
+              <a:t/>
             </a:r>
           </a:p>
           <a:p>
@@ -3757,7 +3758,7 @@
                   <a:srgbClr val="000000"/>
                 </a:solidFill>
               </a:rPr>
-              <a:t>遇到问题先画图、再想算法、最后写代码</a:t>
+              <a:t/>
             </a:r>
           </a:p>
         </p:txBody>
@@ -3843,6 +3844,121 @@
                 </a:solidFill>
               </a:rPr>
               <a:t>本章学习条件判断——让程序根据不同的条件做出不同的选择。if/else、逻辑运算符是核心。</a:t>
+            </a:r>
+          </a:p>
+        </p:txBody>
+      </p:sp>
+    </p:spTree>
+  </p:cSld>
+  <p:clrMapOvr>
+    <a:masterClrMapping/>
+  </p:clrMapOvr>
+</p:sld>
+</file>
+
+<file path=ppt/slides/slide9.xml><?xml version="1.0" encoding="utf-8"?>
+<p:sld xmlns:a="http://schemas.openxmlformats.org/drawingml/2006/main" xmlns:p="http://schemas.openxmlformats.org/presentationml/2006/main" xmlns:r="http://schemas.openxmlformats.org/officeDocument/2006/relationships">
+  <p:cSld>
+    <p:spTree>
+      <p:nvGrpSpPr>
+        <p:cNvPr id="1" name=""/>
+        <p:cNvGrpSpPr/>
+        <p:nvPr/>
+      </p:nvGrpSpPr>
+      <p:grpSpPr/>
+      <p:sp>
+        <p:nvSpPr>
+          <p:cNvPr id="2" name="TextBox 1"/>
+          <p:cNvSpPr txBox="1"/>
+          <p:nvPr/>
+        </p:nvSpPr>
+        <p:spPr>
+          <a:xfrm>
+            <a:off x="457200" y="274320"/>
+            <a:ext cx="10972800" cy="731520"/>
+          </a:xfrm>
+          <a:prstGeom prst="rect">
+            <a:avLst/>
+          </a:prstGeom>
+          <a:noFill/>
+        </p:spPr>
+        <p:txBody>
+          <a:bodyPr wrap="none">
+            <a:spAutoFit/>
+          </a:bodyPr>
+          <a:lstStyle/>
+          <a:p>
+            <a:r>
+              <a:rPr sz="2400" b="1">
+                <a:solidFill>
+                  <a:srgbClr val="8B0000"/>
+                </a:solidFill>
+              </a:rPr>
+              <a:t>第2章 核心要点</a:t>
+            </a:r>
+          </a:p>
+        </p:txBody>
+      </p:sp>
+      <p:sp>
+        <p:nvSpPr>
+          <p:cNvPr id="3" name="TextBox 2"/>
+          <p:cNvSpPr txBox="1"/>
+          <p:nvPr/>
+        </p:nvSpPr>
+        <p:spPr>
+          <a:xfrm>
+            <a:off x="457200" y="1097280"/>
+            <a:ext cx="10972800" cy="5029200"/>
+          </a:xfrm>
+          <a:prstGeom prst="rect">
+            <a:avLst/>
+          </a:prstGeom>
+          <a:noFill/>
+        </p:spPr>
+        <p:txBody>
+          <a:bodyPr wrap="none">
+            <a:spAutoFit/>
+          </a:bodyPr>
+          <a:lstStyle/>
+          <a:p/>
+          <a:p>
+            <a:r>
+              <a:rPr sz="1600">
+                <a:solidFill>
+                  <a:srgbClr val="000000"/>
+                </a:solidFill>
+              </a:rPr>
+              <a:t>• if/else if/else 多分支结构</a:t>
+            </a:r>
+          </a:p>
+          <a:p>
+            <a:r>
+              <a:rPr sz="1600">
+                <a:solidFill>
+                  <a:srgbClr val="000000"/>
+                </a:solidFill>
+              </a:rPr>
+              <a:t>• 逻辑运算符 &amp;&amp;、||、!</a:t>
+            </a:r>
+          </a:p>
+          <a:p>
+            <a:r>
+              <a:rPr sz="1600">
+                <a:solidFill>
+                  <a:srgbClr val="000000"/>
+                </a:solidFill>
+              </a:rPr>
+              <a:t>• 嵌套条件的写法</a:t>
+            </a:r>
+          </a:p>
+          <a:p>
+            <a:r>
+              <a:rPr sz="1600">
+                <a:solidFill>
+                  <a:srgbClr val="000000"/>
+                </a:solidFill>
+              </a:rPr>
+              <a:t>• 浮点数比较的陷阱</a:t>
             </a:r>
           </a:p>
         </p:txBody>
